--- a/ablation/figures/cross-attention.pptx
+++ b/ablation/figures/cross-attention.pptx
@@ -3088,42 +3088,54 @@
         <p:nvPr/>
       </p:nvGrpSpPr>
       <p:grpSpPr/>
-      <p:cxnSp>
-        <p:nvCxnSpPr>
-          <p:cNvPr id="2" name="Connector 1"/>
-          <p:cNvCxnSpPr/>
+      <p:sp>
+        <p:nvSpPr>
+          <p:cNvPr id="2" name="Rounded Rectangle 1"/>
+          <p:cNvSpPr/>
           <p:nvPr/>
-        </p:nvCxnSpPr>
+        </p:nvSpPr>
         <p:spPr>
           <a:xfrm>
-            <a:off x="1710852" y="3023145"/>
-            <a:ext cx="352917" cy="0"/>
-          </a:xfrm>
-          <a:prstGeom prst="line">
-            <a:avLst/>
+            <a:off x="228600" y="2002520"/>
+            <a:ext cx="11734495" cy="2852959"/>
+          </a:xfrm>
+          <a:prstGeom prst="roundRect">
+            <a:avLst>
+              <a:gd name="adj" fmla="val 16000"/>
+            </a:avLst>
           </a:prstGeom>
-          <a:ln w="21590">
+          <a:solidFill>
+            <a:srgbClr val="FDFDFE"/>
+          </a:solidFill>
+          <a:ln w="17780">
             <a:solidFill>
-              <a:srgbClr val="25384B"/>
+              <a:srgbClr val="7E93A6"/>
             </a:solidFill>
-            <a:tailEnd type="triangle" w="med" len="med"/>
           </a:ln>
+          <a:effectLst/>
         </p:spPr>
         <p:style>
-          <a:lnRef idx="2">
+          <a:lnRef idx="1">
             <a:schemeClr val="accent1"/>
           </a:lnRef>
-          <a:fillRef idx="0">
+          <a:fillRef idx="3">
             <a:schemeClr val="accent1"/>
           </a:fillRef>
-          <a:effectRef idx="1">
+          <a:effectRef idx="2">
             <a:schemeClr val="accent1"/>
           </a:effectRef>
           <a:fontRef idx="minor">
-            <a:schemeClr val="tx1"/>
+            <a:schemeClr val="lt1"/>
           </a:fontRef>
         </p:style>
-      </p:cxnSp>
+        <p:txBody>
+          <a:bodyPr rtlCol="0" anchor="ctr" wrap="square" lIns="27000" rIns="27000" tIns="0" bIns="0"/>
+          <a:lstStyle/>
+          <a:p>
+            <a:pPr algn="ctr"/>
+          </a:p>
+        </p:txBody>
+      </p:sp>
       <p:cxnSp>
         <p:nvCxnSpPr>
           <p:cNvPr id="3" name="Connector 2"/>
@@ -3132,8 +3144,8 @@
         </p:nvCxnSpPr>
         <p:spPr>
           <a:xfrm>
-            <a:off x="1710852" y="4434813"/>
-            <a:ext cx="352917" cy="0"/>
+            <a:off x="1875844" y="3012943"/>
+            <a:ext cx="339638" cy="0"/>
           </a:xfrm>
           <a:prstGeom prst="line">
             <a:avLst/>
@@ -3168,8 +3180,8 @@
         </p:nvCxnSpPr>
         <p:spPr>
           <a:xfrm>
-            <a:off x="3457791" y="4434813"/>
-            <a:ext cx="352918" cy="0"/>
+            <a:off x="1875844" y="4371495"/>
+            <a:ext cx="339638" cy="0"/>
           </a:xfrm>
           <a:prstGeom prst="line">
             <a:avLst/>
@@ -3204,8 +3216,8 @@
         </p:nvCxnSpPr>
         <p:spPr>
           <a:xfrm>
-            <a:off x="3457791" y="3023145"/>
-            <a:ext cx="2099857" cy="0"/>
+            <a:off x="3557053" y="4371495"/>
+            <a:ext cx="339638" cy="0"/>
           </a:xfrm>
           <a:prstGeom prst="line">
             <a:avLst/>
@@ -3214,6 +3226,7 @@
             <a:solidFill>
               <a:srgbClr val="25384B"/>
             </a:solidFill>
+            <a:tailEnd type="triangle" w="med" len="med"/>
           </a:ln>
         </p:spPr>
         <p:style>
@@ -3239,8 +3252,8 @@
         </p:nvCxnSpPr>
         <p:spPr>
           <a:xfrm>
-            <a:off x="5557648" y="3023145"/>
-            <a:ext cx="0" cy="705834"/>
+            <a:off x="3557053" y="3012943"/>
+            <a:ext cx="2020846" cy="0"/>
           </a:xfrm>
           <a:prstGeom prst="line">
             <a:avLst/>
@@ -3249,7 +3262,6 @@
             <a:solidFill>
               <a:srgbClr val="25384B"/>
             </a:solidFill>
-            <a:tailEnd type="triangle" w="med" len="med"/>
           </a:ln>
         </p:spPr>
         <p:style>
@@ -3275,8 +3287,8 @@
         </p:nvCxnSpPr>
         <p:spPr>
           <a:xfrm>
-            <a:off x="5204731" y="4434813"/>
-            <a:ext cx="352917" cy="0"/>
+            <a:off x="5577899" y="3012943"/>
+            <a:ext cx="0" cy="679276"/>
           </a:xfrm>
           <a:prstGeom prst="line">
             <a:avLst/>
@@ -3285,6 +3297,7 @@
             <a:solidFill>
               <a:srgbClr val="25384B"/>
             </a:solidFill>
+            <a:tailEnd type="triangle" w="med" len="med"/>
           </a:ln>
         </p:spPr>
         <p:style>
@@ -3309,9 +3322,9 @@
           <p:nvPr/>
         </p:nvCxnSpPr>
         <p:spPr>
-          <a:xfrm flipV="1">
-            <a:off x="5557648" y="3728979"/>
-            <a:ext cx="0" cy="705834"/>
+          <a:xfrm>
+            <a:off x="5238261" y="4371495"/>
+            <a:ext cx="339638" cy="0"/>
           </a:xfrm>
           <a:prstGeom prst="line">
             <a:avLst/>
@@ -3320,7 +3333,6 @@
             <a:solidFill>
               <a:srgbClr val="25384B"/>
             </a:solidFill>
-            <a:tailEnd type="triangle" w="med" len="med"/>
           </a:ln>
         </p:spPr>
         <p:style>
@@ -3345,9 +3357,9 @@
           <p:nvPr/>
         </p:nvCxnSpPr>
         <p:spPr>
-          <a:xfrm>
-            <a:off x="7128130" y="3728979"/>
-            <a:ext cx="335271" cy="0"/>
+          <a:xfrm flipV="1">
+            <a:off x="5577899" y="3692219"/>
+            <a:ext cx="0" cy="679276"/>
           </a:xfrm>
           <a:prstGeom prst="line">
             <a:avLst/>
@@ -3382,8 +3394,8 @@
         </p:nvCxnSpPr>
         <p:spPr>
           <a:xfrm>
-            <a:off x="8769195" y="3728979"/>
-            <a:ext cx="335271" cy="0"/>
+            <a:off x="7089288" y="3692219"/>
+            <a:ext cx="322657" cy="0"/>
           </a:xfrm>
           <a:prstGeom prst="line">
             <a:avLst/>
@@ -3418,8 +3430,8 @@
         </p:nvCxnSpPr>
         <p:spPr>
           <a:xfrm>
-            <a:off x="10410259" y="3728979"/>
-            <a:ext cx="335272" cy="0"/>
+            <a:off x="8668605" y="3692219"/>
+            <a:ext cx="322657" cy="0"/>
           </a:xfrm>
           <a:prstGeom prst="line">
             <a:avLst/>
@@ -3453,17 +3465,18 @@
           <p:nvPr/>
         </p:nvCxnSpPr>
         <p:spPr>
-          <a:xfrm flipV="1">
-            <a:off x="2760780" y="2502592"/>
-            <a:ext cx="0" cy="247042"/>
+          <a:xfrm>
+            <a:off x="10247922" y="3692219"/>
+            <a:ext cx="322657" cy="0"/>
           </a:xfrm>
           <a:prstGeom prst="line">
             <a:avLst/>
           </a:prstGeom>
-          <a:ln w="16510">
+          <a:ln w="21590">
             <a:solidFill>
-              <a:srgbClr val="6E8399"/>
+              <a:srgbClr val="25384B"/>
             </a:solidFill>
+            <a:tailEnd type="triangle" w="med" len="med"/>
           </a:ln>
         </p:spPr>
         <p:style>
@@ -3488,9 +3501,9 @@
           <p:nvPr/>
         </p:nvCxnSpPr>
         <p:spPr>
-          <a:xfrm>
-            <a:off x="2760780" y="2502592"/>
-            <a:ext cx="6996583" cy="0"/>
+          <a:xfrm flipV="1">
+            <a:off x="2886267" y="2511977"/>
+            <a:ext cx="0" cy="237746"/>
           </a:xfrm>
           <a:prstGeom prst="line">
             <a:avLst/>
@@ -3524,8 +3537,43 @@
         </p:nvCxnSpPr>
         <p:spPr>
           <a:xfrm>
-            <a:off x="9757363" y="2502592"/>
-            <a:ext cx="0" cy="952876"/>
+            <a:off x="2886267" y="2511977"/>
+            <a:ext cx="6733325" cy="0"/>
+          </a:xfrm>
+          <a:prstGeom prst="line">
+            <a:avLst/>
+          </a:prstGeom>
+          <a:ln w="16510">
+            <a:solidFill>
+              <a:srgbClr val="6E8399"/>
+            </a:solidFill>
+          </a:ln>
+        </p:spPr>
+        <p:style>
+          <a:lnRef idx="2">
+            <a:schemeClr val="accent1"/>
+          </a:lnRef>
+          <a:fillRef idx="0">
+            <a:schemeClr val="accent1"/>
+          </a:fillRef>
+          <a:effectRef idx="1">
+            <a:schemeClr val="accent1"/>
+          </a:effectRef>
+          <a:fontRef idx="minor">
+            <a:schemeClr val="tx1"/>
+          </a:fontRef>
+        </p:style>
+      </p:cxnSp>
+      <p:cxnSp>
+        <p:nvCxnSpPr>
+          <p:cNvPr id="15" name="Connector 14"/>
+          <p:cNvCxnSpPr/>
+          <p:nvPr/>
+        </p:nvCxnSpPr>
+        <p:spPr>
+          <a:xfrm>
+            <a:off x="9619592" y="2511977"/>
+            <a:ext cx="0" cy="917023"/>
           </a:xfrm>
           <a:prstGeom prst="line">
             <a:avLst/>
@@ -3554,14 +3602,14 @@
       </p:cxnSp>
       <p:sp>
         <p:nvSpPr>
-          <p:cNvPr id="15" name="Rounded Rectangle 14"/>
+          <p:cNvPr id="16" name="Rounded Rectangle 15"/>
           <p:cNvSpPr/>
           <p:nvPr/>
         </p:nvSpPr>
         <p:spPr>
           <a:xfrm>
-            <a:off x="228600" y="2749634"/>
-            <a:ext cx="1482252" cy="547021"/>
+            <a:off x="449364" y="2749723"/>
+            <a:ext cx="1426479" cy="526439"/>
           </a:xfrm>
           <a:prstGeom prst="roundRect">
             <a:avLst>
@@ -3623,14 +3671,14 @@
       </p:sp>
       <p:sp>
         <p:nvSpPr>
-          <p:cNvPr id="16" name="Rounded Rectangle 15"/>
+          <p:cNvPr id="17" name="Rounded Rectangle 16"/>
           <p:cNvSpPr/>
           <p:nvPr/>
         </p:nvSpPr>
         <p:spPr>
           <a:xfrm>
-            <a:off x="228600" y="4161303"/>
-            <a:ext cx="1482252" cy="547021"/>
+            <a:off x="449364" y="4108276"/>
+            <a:ext cx="1426479" cy="526439"/>
           </a:xfrm>
           <a:prstGeom prst="roundRect">
             <a:avLst>
@@ -3692,14 +3740,14 @@
       </p:sp>
       <p:sp>
         <p:nvSpPr>
-          <p:cNvPr id="17" name="Rounded Rectangle 16"/>
+          <p:cNvPr id="18" name="Rounded Rectangle 17"/>
           <p:cNvSpPr/>
           <p:nvPr/>
         </p:nvSpPr>
         <p:spPr>
           <a:xfrm>
-            <a:off x="2063769" y="2749634"/>
-            <a:ext cx="1394022" cy="547021"/>
+            <a:off x="2215482" y="2749723"/>
+            <a:ext cx="1341570" cy="526439"/>
           </a:xfrm>
           <a:prstGeom prst="roundRect">
             <a:avLst>
@@ -3761,14 +3809,14 @@
       </p:sp>
       <p:sp>
         <p:nvSpPr>
-          <p:cNvPr id="18" name="Rounded Rectangle 17"/>
+          <p:cNvPr id="19" name="Rounded Rectangle 18"/>
           <p:cNvSpPr/>
           <p:nvPr/>
         </p:nvSpPr>
         <p:spPr>
           <a:xfrm>
-            <a:off x="2063769" y="4161303"/>
-            <a:ext cx="1394022" cy="547021"/>
+            <a:off x="2215482" y="4108276"/>
+            <a:ext cx="1341570" cy="526439"/>
           </a:xfrm>
           <a:prstGeom prst="roundRect">
             <a:avLst>
@@ -3818,14 +3866,14 @@
       </p:sp>
       <p:sp>
         <p:nvSpPr>
-          <p:cNvPr id="19" name="Rounded Rectangle 18"/>
+          <p:cNvPr id="20" name="Rounded Rectangle 19"/>
           <p:cNvSpPr/>
           <p:nvPr/>
         </p:nvSpPr>
         <p:spPr>
           <a:xfrm>
-            <a:off x="3810709" y="4161303"/>
-            <a:ext cx="1394022" cy="547021"/>
+            <a:off x="3896691" y="4108276"/>
+            <a:ext cx="1341570" cy="526439"/>
           </a:xfrm>
           <a:prstGeom prst="roundRect">
             <a:avLst>
@@ -3887,14 +3935,14 @@
       </p:sp>
       <p:sp>
         <p:nvSpPr>
-          <p:cNvPr id="20" name="Rounded Rectangle 19"/>
+          <p:cNvPr id="21" name="Rounded Rectangle 20"/>
           <p:cNvSpPr/>
           <p:nvPr/>
         </p:nvSpPr>
         <p:spPr>
           <a:xfrm>
-            <a:off x="5557648" y="3455468"/>
-            <a:ext cx="1570481" cy="547021"/>
+            <a:off x="5577899" y="3429000"/>
+            <a:ext cx="1511389" cy="526439"/>
           </a:xfrm>
           <a:prstGeom prst="roundRect">
             <a:avLst>
@@ -3956,14 +4004,14 @@
       </p:sp>
       <p:sp>
         <p:nvSpPr>
-          <p:cNvPr id="21" name="Rounded Rectangle 20"/>
+          <p:cNvPr id="22" name="Rounded Rectangle 21"/>
           <p:cNvSpPr/>
           <p:nvPr/>
         </p:nvSpPr>
         <p:spPr>
           <a:xfrm>
-            <a:off x="7463401" y="3455468"/>
-            <a:ext cx="1305793" cy="547021"/>
+            <a:off x="7411945" y="3429000"/>
+            <a:ext cx="1256660" cy="526439"/>
           </a:xfrm>
           <a:prstGeom prst="roundRect">
             <a:avLst>
@@ -4013,14 +4061,14 @@
       </p:sp>
       <p:sp>
         <p:nvSpPr>
-          <p:cNvPr id="22" name="Rounded Rectangle 21"/>
+          <p:cNvPr id="23" name="Rounded Rectangle 22"/>
           <p:cNvSpPr/>
           <p:nvPr/>
         </p:nvSpPr>
         <p:spPr>
           <a:xfrm>
-            <a:off x="9104466" y="3455468"/>
-            <a:ext cx="1305793" cy="547021"/>
+            <a:off x="8991262" y="3429000"/>
+            <a:ext cx="1256660" cy="526439"/>
           </a:xfrm>
           <a:prstGeom prst="roundRect">
             <a:avLst>
@@ -4070,14 +4118,14 @@
       </p:sp>
       <p:sp>
         <p:nvSpPr>
-          <p:cNvPr id="23" name="Rounded Rectangle 22"/>
+          <p:cNvPr id="24" name="Rounded Rectangle 23"/>
           <p:cNvSpPr/>
           <p:nvPr/>
         </p:nvSpPr>
         <p:spPr>
           <a:xfrm>
-            <a:off x="10745531" y="3455468"/>
-            <a:ext cx="1217564" cy="547021"/>
+            <a:off x="10570579" y="3429000"/>
+            <a:ext cx="1171751" cy="526439"/>
           </a:xfrm>
           <a:prstGeom prst="roundRect">
             <a:avLst>
@@ -4139,14 +4187,14 @@
       </p:sp>
       <p:sp>
         <p:nvSpPr>
-          <p:cNvPr id="24" name="Rounded Rectangle 23"/>
+          <p:cNvPr id="25" name="Rounded Rectangle 24"/>
           <p:cNvSpPr/>
           <p:nvPr/>
         </p:nvSpPr>
         <p:spPr>
           <a:xfrm>
-            <a:off x="228600" y="2149675"/>
-            <a:ext cx="5293757" cy="229396"/>
+            <a:off x="398419" y="2104411"/>
+            <a:ext cx="5094570" cy="220764"/>
           </a:xfrm>
           <a:prstGeom prst="roundRect">
             <a:avLst>

--- a/ablation/figures/cross-attention.pptx
+++ b/ablation/figures/cross-attention.pptx
@@ -3508,9 +3508,9 @@
           <a:prstGeom prst="line">
             <a:avLst/>
           </a:prstGeom>
-          <a:ln w="16510">
+          <a:ln w="19050">
             <a:solidFill>
-              <a:srgbClr val="6E8399"/>
+              <a:srgbClr val="5C748C"/>
             </a:solidFill>
           </a:ln>
         </p:spPr>
@@ -3543,9 +3543,9 @@
           <a:prstGeom prst="line">
             <a:avLst/>
           </a:prstGeom>
-          <a:ln w="16510">
+          <a:ln w="19050">
             <a:solidFill>
-              <a:srgbClr val="6E8399"/>
+              <a:srgbClr val="5C748C"/>
             </a:solidFill>
           </a:ln>
         </p:spPr>
@@ -3578,9 +3578,9 @@
           <a:prstGeom prst="line">
             <a:avLst/>
           </a:prstGeom>
-          <a:ln w="16510">
+          <a:ln w="19050">
             <a:solidFill>
-              <a:srgbClr val="6E8399"/>
+              <a:srgbClr val="5C748C"/>
             </a:solidFill>
             <a:tailEnd type="triangle" w="med" len="med"/>
           </a:ln>
